--- a/content/decks/media-studies/media-studies-s1-lesson-15-exam-rehearsal.pptx
+++ b/content/decks/media-studies/media-studies-s1-lesson-15-exam-rehearsal.pptx
@@ -864,7 +864,7 @@
           <a:p>
             <a:r>
               <a:rPr lang="en-US" dirty="0"/>
-              <a:t>Young musicians tuning and rehearsing: the image of preparation that makes the performance feel like nothing at all.</a:t>
+              <a:t>Young musicians tuning and rehearsing. They practiced until the performance cost them nothing. That is the week's aim.</a:t>
             </a:r>
             <a:endParaRPr lang="en-US" dirty="0"/>
           </a:p>
@@ -2237,7 +2237,7 @@
                 <a:ea typeface="Georgia" pitchFamily="34" charset="-122"/>
                 <a:cs typeface="Georgia" pitchFamily="34" charset="-120"/>
               </a:rPr>
-              <a:t>A 45-minute Section B on your own case studies, peer-marked against the official rubric then moderated live. The last teaching day ends on the success check, stated from memory: the full paper structure and the per-section minute budget. Then logistics, once, calmly: bring nothing but pens.</a:t>
+              <a:t>A 45-minute Section B on your own case studies, peer-marked as Beat the Examiner, full dress: the official rubric, then live moderation. The last teaching day ends on the success check, stated from memory: the full paper structure and the per-section minute budget. Then logistics, once, calmly: bring nothing but pens.</a:t>
             </a:r>
             <a:endParaRPr lang="en-US" sz="2000" dirty="0"/>
           </a:p>
@@ -2862,7 +2862,7 @@
       </p:grpSpPr>
       <p:pic>
         <p:nvPicPr>
-          <p:cNvPr id="2" name="Image 0" descr="/private/tmp/claude-501/-Users-dogan-Documents-Vaults-Courses/a3a5132d-721f-4cd4-8ddd-e62e2b37b51b/scratchpad/img/crops/caravaggio-musicians_a1777.jpg">    </p:cNvPr>
+          <p:cNvPr id="2" name="Image 0" descr="/Users/dogan/Documents/Vaults/Courses/wiki/classes/media-studies/decks/_build/img/crops/caravaggio-musicians_a1777.jpg">    </p:cNvPr>
           <p:cNvPicPr>
             <a:picLocks noChangeAspect="1"/>
           </p:cNvPicPr>
@@ -4482,7 +4482,7 @@
                 <a:ea typeface="Georgia" pitchFamily="34" charset="-122"/>
                 <a:cs typeface="Georgia" pitchFamily="34" charset="-120"/>
               </a:rPr>
-              <a:t>A full Section B, timed exactly, on your own case studies. Then every student marks a peer's script against the official five-criteria rubric, band words and all. Reading the mark scheme as a marker, once, before being marked by it, is the lesson; the mark is a by-product. The teacher moderates three scripts aloud, showing where the peer marks drifted.</a:t>
+              <a:t>Beat the Examiner, full dress. A full Section B, timed exactly, on your own case studies. Then every student marks a peer's script against the official five-criteria rubric, band words and all; the closest banding to the moderated mark takes the round. Reading the scheme as a marker is the lesson. The teacher moderates three scripts aloud, showing where the peer marks drifted.</a:t>
             </a:r>
             <a:endParaRPr lang="en-US" sz="2000" dirty="0"/>
           </a:p>
